--- a/deck/SIH2026_SIH26164_Q-DARPAN.pptx
+++ b/deck/SIH2026_SIH26164_Q-DARPAN.pptx
@@ -6357,7 +6357,7 @@
                 </a:solidFill>
                 <a:latin typeface="Calibri"/>
               </a:rPr>
-              <a:t>CycloneDX 1.7 (v1.6 = ECMA-424)</a:t>
+              <a:t>CycloneDX 1.7 = ECMA-424 2nd edition</a:t>
             </a:r>
           </a:p>
           <a:p>
@@ -6547,7 +6547,7 @@
                 </a:solidFill>
                 <a:latin typeface="Calibri"/>
               </a:rPr>
-              <a:t>RSA/ECC flagged against NIST IR 8547</a:t>
+              <a:t>RSA/ECC flagged against NIST IR 8547 (ipd)</a:t>
             </a:r>
           </a:p>
           <a:p>
@@ -6765,7 +6765,7 @@
                 </a:solidFill>
                 <a:latin typeface="Calibri"/>
               </a:rPr>
-              <a:t>sonar-cryptography reads Java, Python, Go only</a:t>
+              <a:t>sonar-cryptography has no C/C++ (Java, Python, Go, C#)</a:t>
             </a:r>
           </a:p>
           <a:p>
@@ -9898,7 +9898,7 @@
                 </a:solidFill>
                 <a:latin typeface="Calibri"/>
               </a:rPr>
-              <a:t>Working prototype: 4 collectors, 20 tests green, CycloneDX 1.7 output</a:t>
+              <a:t>Working prototype: 4 collectors, 109 tests green, CycloneDX 1.7 output</a:t>
             </a:r>
           </a:p>
           <a:p>
@@ -9926,7 +9926,7 @@
                 </a:solidFill>
                 <a:latin typeface="Calibri"/>
               </a:rPr>
-              <a:t>One agentless Python CLI + GUI; runs fully on-premises</a:t>
+              <a:t>One agentless Python CLI; on-premises, CPU-only, no GPU</a:t>
             </a:r>
           </a:p>
           <a:p>
@@ -11991,7 +11991,7 @@
                 </a:solidFill>
                 <a:latin typeface="Calibri"/>
               </a:rPr>
-              <a:t>RFC 10024, PQ/T Hybrid Key Agreement for TLS 1.3, 2026</a:t>
+              <a:t>RFC 10024, PQ/T Hybrid Key Agreement for TLS 1.3, Aug 2026</a:t>
             </a:r>
           </a:p>
           <a:p>
@@ -12019,7 +12019,7 @@
                 </a:solidFill>
                 <a:latin typeface="Calibri"/>
               </a:rPr>
-              <a:t>CycloneDX v1.7, Oct 2025; v1.6 is ECMA-424</a:t>
+              <a:t>v1.7 = 2nd edition Dec 2025; v1.6 = 1st edition Jun 2024</a:t>
             </a:r>
           </a:p>
         </p:txBody>
@@ -12458,7 +12458,7 @@
                 </a:solidFill>
                 <a:latin typeface="Calibri"/>
               </a:rPr>
-              <a:t>Four collectors, CycloneDX 1.7 emitter, Mosca risk engine and FIPS 203/204/205 recommender. 20 unit tests passing. Apache-2.0.</a:t>
+              <a:t>Four collectors, CycloneDX 1.7 emitter, Mosca risk engine and FIPS 203/204/205 recommender. 109 tests passing. Apache-2.0.</a:t>
             </a:r>
           </a:p>
         </p:txBody>

--- a/deck/SIH2026_SIH26164_Q-DARPAN.pptx
+++ b/deck/SIH2026_SIH26164_Q-DARPAN.pptx
@@ -6292,7 +6292,7 @@
                 </a:solidFill>
                 <a:latin typeface="Calibri"/>
               </a:rPr>
-              <a:t>Collectors: </a:t>
+              <a:t>Six Collectors: </a:t>
             </a:r>
             <a:r>
               <a:rPr sz="1200" b="0" i="0">
@@ -6301,7 +6301,7 @@
                 </a:solidFill>
                 <a:latin typeface="Calibri"/>
               </a:rPr>
-              <a:t>source AST, ELF, containers, live TLS</a:t>
+              <a:t>repos, binaries, libraries, containers, TLS, HSM + cloud</a:t>
             </a:r>
           </a:p>
           <a:p>
@@ -6320,7 +6320,7 @@
                 </a:solidFill>
                 <a:latin typeface="Calibri"/>
               </a:rPr>
-              <a:t>Normaliser: </a:t>
+              <a:t>Every Artefact: </a:t>
             </a:r>
             <a:r>
               <a:rPr sz="1200" b="0" i="0">
@@ -6329,7 +6329,7 @@
                 </a:solidFill>
                 <a:latin typeface="Calibri"/>
               </a:rPr>
-              <a:t>cross-surface dedupe with confidence scoring</a:t>
+              <a:t>algorithms, keys, certificates, protocols, libraries, hardware</a:t>
             </a:r>
           </a:p>
           <a:p>
@@ -6348,7 +6348,7 @@
                 </a:solidFill>
                 <a:latin typeface="Calibri"/>
               </a:rPr>
-              <a:t>CBOM: </a:t>
+              <a:t>Standard CBOM: </a:t>
             </a:r>
             <a:r>
               <a:rPr sz="1200" b="0" i="0">
@@ -6357,7 +6357,7 @@
                 </a:solidFill>
                 <a:latin typeface="Calibri"/>
               </a:rPr>
-              <a:t>CycloneDX 1.7 = ECMA-424 2nd edition</a:t>
+              <a:t>CycloneDX 1.7 = ECMA-424 2nd ed, with versions and modes</a:t>
             </a:r>
           </a:p>
           <a:p>
@@ -6376,7 +6376,7 @@
                 </a:solidFill>
                 <a:latin typeface="Calibri"/>
               </a:rPr>
-              <a:t>Engine: </a:t>
+              <a:t>Engine + GUI: </a:t>
             </a:r>
             <a:r>
               <a:rPr sz="1200" b="0" i="0">
@@ -6385,7 +6385,7 @@
                 </a:solidFill>
                 <a:latin typeface="Calibri"/>
               </a:rPr>
-              <a:t>Mosca scoring plus FIPS 203/204/205 recommender</a:t>
+              <a:t>Mosca risk, FIPS 203/204/205 advice, interactive dashboard</a:t>
             </a:r>
           </a:p>
         </p:txBody>
@@ -6519,7 +6519,7 @@
                 </a:solidFill>
                 <a:latin typeface="Calibri"/>
               </a:rPr>
-              <a:t>algorithms, keys, certificates, libraries, protocols</a:t>
+              <a:t>every artefact, across internal and external facing estate</a:t>
             </a:r>
           </a:p>
           <a:p>
@@ -6547,7 +6547,7 @@
                 </a:solidFill>
                 <a:latin typeface="Calibri"/>
               </a:rPr>
-              <a:t>RSA/ECC flagged against NIST IR 8547 (ipd)</a:t>
+              <a:t>systems exposed to Shor or Grover, and the data at stake</a:t>
             </a:r>
           </a:p>
           <a:p>
@@ -6575,7 +6575,7 @@
                 </a:solidFill>
                 <a:latin typeface="Calibri"/>
               </a:rPr>
-              <a:t>type, lifetime, criticality via Mosca's X+Y&gt;Z</a:t>
+              <a:t>type, lifetime, business criticality via Mosca X+Y&gt;Z</a:t>
             </a:r>
           </a:p>
           <a:p>
@@ -6603,7 +6603,7 @@
                 </a:solidFill>
                 <a:latin typeface="Calibri"/>
               </a:rPr>
-              <a:t>hybrid or pure PQC by latency, cost</a:t>
+              <a:t>PQC or hybrid, ranked by risk profile, latency and cost</a:t>
             </a:r>
           </a:p>
         </p:txBody>
@@ -6821,7 +6821,7 @@
                 </a:solidFill>
                 <a:latin typeface="Calibri"/>
               </a:rPr>
-              <a:t>offline scan, no agents, no cloud upload</a:t>
+              <a:t>offline scan, no agents, no cloud upload, CPU-only</a:t>
             </a:r>
           </a:p>
           <a:p>
@@ -6840,7 +6840,7 @@
                 </a:solidFill>
                 <a:latin typeface="Calibri"/>
               </a:rPr>
-              <a:t>Size Delta: </a:t>
+              <a:t>Running Today: </a:t>
             </a:r>
             <a:r>
               <a:rPr sz="1200" b="0" i="0">
@@ -6849,7 +6849,7 @@
                 </a:solidFill>
                 <a:latin typeface="Calibri"/>
               </a:rPr>
-              <a:t>ML-DSA-65 costs +1888 B key, 51.7x payload</a:t>
+              <a:t>public repo, 109 tests green, 51.7x ML-DSA delta measured</a:t>
             </a:r>
           </a:p>
         </p:txBody>
@@ -7547,7 +7547,7 @@
                 </a:solidFill>
                 <a:latin typeface="Calibri"/>
               </a:rPr>
-              <a:t>SOURCE AST SCAN</a:t>
+              <a:t>SOURCE REPO SCAN</a:t>
             </a:r>
           </a:p>
           <a:p>
@@ -7628,7 +7628,7 @@
                 </a:solidFill>
                 <a:latin typeface="Calibri"/>
               </a:rPr>
-              <a:t>BINARY / ELF SCAN</a:t>
+              <a:t>BINARY + LIBRARY</a:t>
             </a:r>
           </a:p>
           <a:p>
@@ -7644,7 +7644,7 @@
                 </a:solidFill>
                 <a:latin typeface="Calibri"/>
               </a:rPr>
-              <a:t>DT_NEEDED + constant search</a:t>
+              <a:t>DT_NEEDED, symbols, constants</a:t>
             </a:r>
           </a:p>
         </p:txBody>
@@ -7790,7 +7790,7 @@
                 </a:solidFill>
                 <a:latin typeface="Calibri"/>
               </a:rPr>
-              <a:t>LIVE TLS PROBE</a:t>
+              <a:t>TLS, HSM + CLOUD</a:t>
             </a:r>
           </a:p>
           <a:p>
@@ -7806,7 +7806,7 @@
                 </a:solidFill>
                 <a:latin typeface="Calibri"/>
               </a:rPr>
-              <a:t>handshake, certs, groups</a:t>
+              <a:t>handshake, PKCS#11, KMS</a:t>
             </a:r>
           </a:p>
         </p:txBody>
@@ -8292,7 +8292,7 @@
                 </a:solidFill>
                 <a:latin typeface="Calibri"/>
               </a:rPr>
-              <a:t>ANALYST DASHBOARD</a:t>
+              <a:t>INTERACTIVE GUI</a:t>
             </a:r>
           </a:p>
           <a:p>
@@ -8308,7 +8308,7 @@
                 </a:solidFill>
                 <a:latin typeface="Calibri"/>
               </a:rPr>
-              <a:t>ranked migration queue</a:t>
+              <a:t>scan, risks, ranked queue</a:t>
             </a:r>
           </a:p>
         </p:txBody>
@@ -8884,7 +8884,7 @@
                 </a:solidFill>
                 <a:latin typeface="Calibri"/>
               </a:rPr>
-              <a:t>tree-sitter, pyelftools, syft, OpenSSL</a:t>
+              <a:t>tree-sitter, pyelftools, PKCS#11, OpenSSL</a:t>
             </a:r>
           </a:p>
           <a:p>
@@ -8912,7 +8912,7 @@
                 </a:solidFill>
                 <a:latin typeface="Calibri"/>
               </a:rPr>
-              <a:t>Python 3.12, CycloneDX 1.7 emitter</a:t>
+              <a:t>Python 3.10+, CycloneDX 1.7 emitter</a:t>
             </a:r>
           </a:p>
           <a:p>
@@ -8940,7 +8940,7 @@
                 </a:solidFill>
                 <a:latin typeface="Calibri"/>
               </a:rPr>
-              <a:t>FastAPI, React dashboard, offline CLI</a:t>
+              <a:t>FastAPI, interactive dashboard, offline CLI</a:t>
             </a:r>
           </a:p>
           <a:p>
@@ -9102,7 +9102,7 @@
                 </a:solidFill>
                 <a:latin typeface="Calibri"/>
               </a:rPr>
-              <a:t>four surfaces, one pass</a:t>
+              <a:t>six surfaces, one pass</a:t>
             </a:r>
           </a:p>
           <a:p>
@@ -9898,7 +9898,7 @@
                 </a:solidFill>
                 <a:latin typeface="Calibri"/>
               </a:rPr>
-              <a:t>Working prototype: 4 collectors, 109 tests green, CycloneDX 1.7 output</a:t>
+              <a:t>Running today: 4 of 6 collectors, 109 tests green, CBOM shipping</a:t>
             </a:r>
           </a:p>
           <a:p>
@@ -9926,7 +9926,7 @@
                 </a:solidFill>
                 <a:latin typeface="Calibri"/>
               </a:rPr>
-              <a:t>One agentless Python CLI; on-premises, CPU-only, no GPU</a:t>
+              <a:t>Agentless CLI plus interactive GUI; on-prem, CPU-only, no GPU</a:t>
             </a:r>
           </a:p>
           <a:p>
@@ -11124,7 +11124,7 @@
                 </a:solidFill>
                 <a:latin typeface="Calibri"/>
               </a:rPr>
-              <a:t>412 repos, 190 images, 2,300 TLS endpoints catalogued from zero</a:t>
+              <a:t>412 repos, 190 images, 2,300 TLS endpoints, 40 HSM slots from zero</a:t>
             </a:r>
           </a:p>
           <a:p>
@@ -11330,7 +11330,7 @@
                 </a:solidFill>
                 <a:latin typeface="Calibri"/>
               </a:rPr>
-              <a:t>one scan spans source, binaries, containers, live TLS</a:t>
+              <a:t>one pass spans repos, binaries, containers, TLS, HSM, cloud</a:t>
             </a:r>
           </a:p>
           <a:p>
@@ -11377,7 +11377,7 @@
                 </a:solidFill>
                 <a:latin typeface="Calibri"/>
               </a:rPr>
-              <a:t>Operations: </a:t>
+              <a:t>Data Risk: </a:t>
             </a:r>
             <a:r>
               <a:rPr sz="1200" b="0" i="0">
@@ -11386,7 +11386,7 @@
                 </a:solidFill>
                 <a:latin typeface="Calibri"/>
               </a:rPr>
-              <a:t>run by the agency SOC as a quarterly scan; no licence, no per-endpoint fee</a:t>
+              <a:t>ties every weak asset to the sensitive data it is protecting</a:t>
             </a:r>
           </a:p>
         </p:txBody>

--- a/deck/SIH2026_SIH26164_Q-DARPAN.pptx
+++ b/deck/SIH2026_SIH26164_Q-DARPAN.pptx
@@ -6292,7 +6292,7 @@
                 </a:solidFill>
                 <a:latin typeface="Calibri"/>
               </a:rPr>
-              <a:t>Six Collectors: </a:t>
+              <a:t>Total Discovery: </a:t>
             </a:r>
             <a:r>
               <a:rPr sz="1200" b="0" i="0">
@@ -6301,7 +6301,7 @@
                 </a:solidFill>
                 <a:latin typeface="Calibri"/>
               </a:rPr>
-              <a:t>repos, binaries, libraries, containers, TLS, HSM + cloud</a:t>
+              <a:t>repos, binaries, libraries, containers, TLS, HSM, cloud KMS</a:t>
             </a:r>
           </a:p>
           <a:p>
@@ -6348,7 +6348,7 @@
                 </a:solidFill>
                 <a:latin typeface="Calibri"/>
               </a:rPr>
-              <a:t>Standard CBOM: </a:t>
+              <a:t>Audit-Grade CBOM: </a:t>
             </a:r>
             <a:r>
               <a:rPr sz="1200" b="0" i="0">
@@ -6357,7 +6357,7 @@
                 </a:solidFill>
                 <a:latin typeface="Calibri"/>
               </a:rPr>
-              <a:t>CycloneDX 1.7 = ECMA-424 2nd ed, with versions and modes</a:t>
+              <a:t>CycloneDX 1.7 = ECMA-424 2nd ed, versions, modes, evidence</a:t>
             </a:r>
           </a:p>
           <a:p>
@@ -6376,7 +6376,7 @@
                 </a:solidFill>
                 <a:latin typeface="Calibri"/>
               </a:rPr>
-              <a:t>Engine + GUI: </a:t>
+              <a:t>Decision Engine: </a:t>
             </a:r>
             <a:r>
               <a:rPr sz="1200" b="0" i="0">
@@ -6519,7 +6519,7 @@
                 </a:solidFill>
                 <a:latin typeface="Calibri"/>
               </a:rPr>
-              <a:t>every artefact, across internal and external facing estate</a:t>
+              <a:t>every artefact, internal and external facing, nothing exempt</a:t>
             </a:r>
           </a:p>
           <a:p>
@@ -6547,7 +6547,7 @@
                 </a:solidFill>
                 <a:latin typeface="Calibri"/>
               </a:rPr>
-              <a:t>systems exposed to Shor or Grover, and the data at stake</a:t>
+              <a:t>every system exposed to Shor or Grover, and the data at stake</a:t>
             </a:r>
           </a:p>
           <a:p>
@@ -6765,7 +6765,7 @@
                 </a:solidFill>
                 <a:latin typeface="Calibri"/>
               </a:rPr>
-              <a:t>sonar-cryptography has no C/C++ (Java, Python, Go, C#)</a:t>
+              <a:t>CBOMkit's engine cannot read C/C++. Q-DARPAN does</a:t>
             </a:r>
           </a:p>
           <a:p>
@@ -6812,7 +6812,7 @@
                 </a:solidFill>
                 <a:latin typeface="Calibri"/>
               </a:rPr>
-              <a:t>Air-Gapped: </a:t>
+              <a:t>Sovereign: </a:t>
             </a:r>
             <a:r>
               <a:rPr sz="1200" b="0" i="0">
@@ -6821,7 +6821,7 @@
                 </a:solidFill>
                 <a:latin typeface="Calibri"/>
               </a:rPr>
-              <a:t>offline scan, no agents, no cloud upload, CPU-only</a:t>
+              <a:t>air-gapped, no agents, no egress, CPU-only, Apache-2.0</a:t>
             </a:r>
           </a:p>
           <a:p>
@@ -6840,7 +6840,7 @@
                 </a:solidFill>
                 <a:latin typeface="Calibri"/>
               </a:rPr>
-              <a:t>Running Today: </a:t>
+              <a:t>Not a Concept: </a:t>
             </a:r>
             <a:r>
               <a:rPr sz="1200" b="0" i="0">
@@ -6849,7 +6849,7 @@
                 </a:solidFill>
                 <a:latin typeface="Calibri"/>
               </a:rPr>
-              <a:t>public repo, 109 tests green, 51.7x ML-DSA delta measured</a:t>
+              <a:t>public repo, 109 tests green, CBOM shipping today</a:t>
             </a:r>
           </a:p>
         </p:txBody>
@@ -9898,7 +9898,7 @@
                 </a:solidFill>
                 <a:latin typeface="Calibri"/>
               </a:rPr>
-              <a:t>Running today: 4 of 6 collectors, 109 tests green, CBOM shipping</a:t>
+              <a:t>Already running: 4 of 6 collectors, 109 tests green, valid CBOM out</a:t>
             </a:r>
           </a:p>
           <a:p>
@@ -9954,7 +9954,7 @@
                 </a:solidFill>
                 <a:latin typeface="Calibri"/>
               </a:rPr>
-              <a:t>Apache-2.0 stack; ~6 dev-months to pilot; zero licence cost</a:t>
+              <a:t>Apache-2.0; pilot in 6 dev-months; zero licence, zero per-endpoint fee</a:t>
             </a:r>
           </a:p>
         </p:txBody>
@@ -11274,7 +11274,7 @@
                 </a:solidFill>
                 <a:latin typeface="Calibri"/>
               </a:rPr>
-              <a:t>on-prem and sovereign; no foreign agent in CII networks</a:t>
+              <a:t>sovereign by design; no foreign agent inside a CII network</a:t>
             </a:r>
           </a:p>
           <a:p>
@@ -11358,7 +11358,7 @@
                 </a:solidFill>
                 <a:latin typeface="Calibri"/>
               </a:rPr>
-              <a:t>CycloneDX 1.7 CBOM any auditor can reload</a:t>
+              <a:t>ECMA-424 CBOM any auditor or vendor can reload</a:t>
             </a:r>
           </a:p>
           <a:p>

--- a/deck/SIH2026_SIH26164_Q-DARPAN.pptx
+++ b/deck/SIH2026_SIH26164_Q-DARPAN.pptx
@@ -6849,7 +6849,7 @@
                 </a:solidFill>
                 <a:latin typeface="Calibri"/>
               </a:rPr>
-              <a:t>public repo, 109 tests green, CBOM shipping today</a:t>
+              <a:t>public repo, 123 tests green, CBOM and GUI shipping today</a:t>
             </a:r>
           </a:p>
         </p:txBody>
@@ -9898,7 +9898,7 @@
                 </a:solidFill>
                 <a:latin typeface="Calibri"/>
               </a:rPr>
-              <a:t>Already running: 4 of 6 collectors, 109 tests green, valid CBOM out</a:t>
+              <a:t>Already running: 4 of 6 collectors, GUI, 123 tests, valid CBOM out</a:t>
             </a:r>
           </a:p>
           <a:p>
@@ -12458,7 +12458,7 @@
                 </a:solidFill>
                 <a:latin typeface="Calibri"/>
               </a:rPr>
-              <a:t>Four collectors, CycloneDX 1.7 emitter, Mosca risk engine and FIPS 203/204/205 recommender. 109 tests passing. Apache-2.0.</a:t>
+              <a:t>Four collectors, CycloneDX 1.7 emitter, Mosca risk engine, FIPS 203/204/205 recommender and interactive GUI. 123 tests passing. Apache-2.0.</a:t>
             </a:r>
           </a:p>
         </p:txBody>
